--- a/presentation/output/DivX-phase-two-v2.pptx
+++ b/presentation/output/DivX-phase-two-v2.pptx
@@ -7712,7 +7712,7 @@
                 <a:ea typeface="Helvetica Neue"/>
                 <a:cs typeface="Helvetica Neue"/>
               </a:rPr>
-              <a:t>DIVIDENDX TREATMENT</a:t>
+              <a:t>DIVX TREATMENT</a:t>
             </a:r>
           </a:p>
         </p:txBody>
